--- a/Отчет по учебной практике ПМ.01.pptx
+++ b/Отчет по учебной практике ПМ.01.pptx
@@ -280,7 +280,7 @@
           <a:p>
             <a:fld id="{2661317D-65A9-4F36-85E2-C40FF9D02A5C}" type="datetimeFigureOut">
               <a:rPr lang="ru-RU" smtClean="0"/>
-              <a:t>15.03.2025</a:t>
+              <a:t>18.03.2025</a:t>
             </a:fld>
             <a:endParaRPr lang="ru-RU"/>
           </a:p>
@@ -478,7 +478,7 @@
           <a:p>
             <a:fld id="{2661317D-65A9-4F36-85E2-C40FF9D02A5C}" type="datetimeFigureOut">
               <a:rPr lang="ru-RU" smtClean="0"/>
-              <a:t>15.03.2025</a:t>
+              <a:t>18.03.2025</a:t>
             </a:fld>
             <a:endParaRPr lang="ru-RU"/>
           </a:p>
@@ -686,7 +686,7 @@
           <a:p>
             <a:fld id="{2661317D-65A9-4F36-85E2-C40FF9D02A5C}" type="datetimeFigureOut">
               <a:rPr lang="ru-RU" smtClean="0"/>
-              <a:t>15.03.2025</a:t>
+              <a:t>18.03.2025</a:t>
             </a:fld>
             <a:endParaRPr lang="ru-RU"/>
           </a:p>
@@ -884,7 +884,7 @@
           <a:p>
             <a:fld id="{2661317D-65A9-4F36-85E2-C40FF9D02A5C}" type="datetimeFigureOut">
               <a:rPr lang="ru-RU" smtClean="0"/>
-              <a:t>15.03.2025</a:t>
+              <a:t>18.03.2025</a:t>
             </a:fld>
             <a:endParaRPr lang="ru-RU"/>
           </a:p>
@@ -1159,7 +1159,7 @@
           <a:p>
             <a:fld id="{2661317D-65A9-4F36-85E2-C40FF9D02A5C}" type="datetimeFigureOut">
               <a:rPr lang="ru-RU" smtClean="0"/>
-              <a:t>15.03.2025</a:t>
+              <a:t>18.03.2025</a:t>
             </a:fld>
             <a:endParaRPr lang="ru-RU"/>
           </a:p>
@@ -1424,7 +1424,7 @@
           <a:p>
             <a:fld id="{2661317D-65A9-4F36-85E2-C40FF9D02A5C}" type="datetimeFigureOut">
               <a:rPr lang="ru-RU" smtClean="0"/>
-              <a:t>15.03.2025</a:t>
+              <a:t>18.03.2025</a:t>
             </a:fld>
             <a:endParaRPr lang="ru-RU"/>
           </a:p>
@@ -1836,7 +1836,7 @@
           <a:p>
             <a:fld id="{2661317D-65A9-4F36-85E2-C40FF9D02A5C}" type="datetimeFigureOut">
               <a:rPr lang="ru-RU" smtClean="0"/>
-              <a:t>15.03.2025</a:t>
+              <a:t>18.03.2025</a:t>
             </a:fld>
             <a:endParaRPr lang="ru-RU"/>
           </a:p>
@@ -1977,7 +1977,7 @@
           <a:p>
             <a:fld id="{2661317D-65A9-4F36-85E2-C40FF9D02A5C}" type="datetimeFigureOut">
               <a:rPr lang="ru-RU" smtClean="0"/>
-              <a:t>15.03.2025</a:t>
+              <a:t>18.03.2025</a:t>
             </a:fld>
             <a:endParaRPr lang="ru-RU"/>
           </a:p>
@@ -2090,7 +2090,7 @@
           <a:p>
             <a:fld id="{2661317D-65A9-4F36-85E2-C40FF9D02A5C}" type="datetimeFigureOut">
               <a:rPr lang="ru-RU" smtClean="0"/>
-              <a:t>15.03.2025</a:t>
+              <a:t>18.03.2025</a:t>
             </a:fld>
             <a:endParaRPr lang="ru-RU"/>
           </a:p>
@@ -2401,7 +2401,7 @@
           <a:p>
             <a:fld id="{2661317D-65A9-4F36-85E2-C40FF9D02A5C}" type="datetimeFigureOut">
               <a:rPr lang="ru-RU" smtClean="0"/>
-              <a:t>15.03.2025</a:t>
+              <a:t>18.03.2025</a:t>
             </a:fld>
             <a:endParaRPr lang="ru-RU"/>
           </a:p>
@@ -2689,7 +2689,7 @@
           <a:p>
             <a:fld id="{2661317D-65A9-4F36-85E2-C40FF9D02A5C}" type="datetimeFigureOut">
               <a:rPr lang="ru-RU" smtClean="0"/>
-              <a:t>15.03.2025</a:t>
+              <a:t>18.03.2025</a:t>
             </a:fld>
             <a:endParaRPr lang="ru-RU"/>
           </a:p>
@@ -2930,7 +2930,7 @@
           <a:p>
             <a:fld id="{2661317D-65A9-4F36-85E2-C40FF9D02A5C}" type="datetimeFigureOut">
               <a:rPr lang="ru-RU" smtClean="0"/>
-              <a:t>15.03.2025</a:t>
+              <a:t>18.03.2025</a:t>
             </a:fld>
             <a:endParaRPr lang="ru-RU"/>
           </a:p>
@@ -3921,42 +3921,8 @@
         </p:blipFill>
         <p:spPr>
           <a:xfrm>
-            <a:off x="372877" y="896095"/>
+            <a:off x="763402" y="1448545"/>
             <a:ext cx="8598921" cy="2697036"/>
-          </a:xfrm>
-          <a:prstGeom prst="rect">
-            <a:avLst/>
-          </a:prstGeom>
-          <a:ln>
-            <a:solidFill>
-              <a:schemeClr val="tx1"/>
-            </a:solidFill>
-          </a:ln>
-        </p:spPr>
-      </p:pic>
-      <p:pic>
-        <p:nvPicPr>
-          <p:cNvPr id="4" name="Рисунок 3">
-            <a:extLst>
-              <a:ext uri="{FF2B5EF4-FFF2-40B4-BE49-F238E27FC236}">
-                <a16:creationId xmlns:a16="http://schemas.microsoft.com/office/drawing/2014/main" id="{B88BCE81-7EDC-4941-9EC0-FAA3F53F0D84}"/>
-              </a:ext>
-            </a:extLst>
-          </p:cNvPr>
-          <p:cNvPicPr>
-            <a:picLocks noChangeAspect="1"/>
-          </p:cNvPicPr>
-          <p:nvPr/>
-        </p:nvPicPr>
-        <p:blipFill rotWithShape="1">
-          <a:blip r:embed="rId3"/>
-          <a:srcRect b="41702"/>
-          <a:stretch/>
-        </p:blipFill>
-        <p:spPr>
-          <a:xfrm>
-            <a:off x="1849918" y="3667225"/>
-            <a:ext cx="9919112" cy="3072083"/>
           </a:xfrm>
           <a:prstGeom prst="rect">
             <a:avLst/>
@@ -5328,7 +5294,7 @@
                 <a:latin typeface="Times New Roman" panose="02020603050405020304" pitchFamily="18" charset="0"/>
                 <a:cs typeface="Times New Roman" panose="02020603050405020304" pitchFamily="18" charset="0"/>
               </a:rPr>
-              <a:t>Окно менеджера по продажам</a:t>
+              <a:t>Окно бухгалтера </a:t>
             </a:r>
           </a:p>
         </p:txBody>
@@ -5489,7 +5455,7 @@
         </p:blipFill>
         <p:spPr>
           <a:xfrm>
-            <a:off x="4563077" y="896094"/>
+            <a:off x="4670457" y="891405"/>
             <a:ext cx="2579977" cy="5733281"/>
           </a:xfrm>
           <a:prstGeom prst="rect">
@@ -5667,10 +5633,10 @@
       </p:sp>
       <p:pic>
         <p:nvPicPr>
-          <p:cNvPr id="5" name="Рисунок 4">
-            <a:extLst>
-              <a:ext uri="{FF2B5EF4-FFF2-40B4-BE49-F238E27FC236}">
-                <a16:creationId xmlns:a16="http://schemas.microsoft.com/office/drawing/2014/main" id="{57CDFC71-6A60-4F01-A2D8-2D4A0D843A6D}"/>
+          <p:cNvPr id="7" name="Рисунок 6">
+            <a:extLst>
+              <a:ext uri="{FF2B5EF4-FFF2-40B4-BE49-F238E27FC236}">
+                <a16:creationId xmlns:a16="http://schemas.microsoft.com/office/drawing/2014/main" id="{40253685-39EC-4A00-8576-424378E27BCB}"/>
               </a:ext>
             </a:extLst>
           </p:cNvPr>
@@ -5687,8 +5653,8 @@
         </p:blipFill>
         <p:spPr>
           <a:xfrm>
-            <a:off x="1549166" y="1289464"/>
-            <a:ext cx="9093668" cy="5387891"/>
+            <a:off x="1413963" y="1315210"/>
+            <a:ext cx="9364073" cy="5447540"/>
           </a:xfrm>
           <a:prstGeom prst="rect">
             <a:avLst/>
